--- a/Presentacion_Centinela_AI.pptx
+++ b/Presentacion_Centinela_AI.pptx
@@ -3322,7 +3322,7 @@
                 </a:solidFill>
                 <a:latin typeface="Calibri"/>
               </a:rPr>
-              <a:t>Presentación Ejecutiva  ·  Actualizado 11 de agosto de 2026</a:t>
+              <a:t>Presentación Ejecutiva  ·  Actualizado 28 de agosto de 2026</a:t>
             </a:r>
           </a:p>
         </p:txBody>
@@ -10297,7 +10297,7 @@
                 </a:solidFill>
                 <a:latin typeface="Calibri"/>
               </a:rPr>
-              <a:t>El motor de auditoría CMMI está activo y evaluando los repositorios de código reales de la organización, atribuyendo cada hallazgo al proyecto exacto donde ocurre.</a:t>
+              <a:t>El motor CMMI está activo sobre los repositorios reales de la organización. Realineado (agosto 2026) contra el manual de metodología propio de C&amp;A: evalúa 5 de las 19 áreas del modelo — solo las que un escáner de código puede evidenciar honestamente — y marca las otras 14 como “no evaluado” en vez de asumirlas.</a:t>
             </a:r>
           </a:p>
         </p:txBody>
@@ -10332,7 +10332,7 @@
                 </a:solidFill>
                 <a:latin typeface="Calibri"/>
               </a:rPr>
-              <a:t>CAR = análisis de causa raíz de errores  ·  MSR = medición de desempeño  ·  PQA = aseguramiento de calidad</a:t>
+              <a:t>Áreas evaluadas: CAR (causa raíz)  ·  PQA (higiene de código)  ·  CM (control de versiones Git)  ·  MC (monitoreo y control)  ·  VV (verificación)</a:t>
             </a:r>
           </a:p>
         </p:txBody>
@@ -11427,7 +11427,7 @@
                 </a:solidFill>
                 <a:latin typeface="Calibri"/>
               </a:rPr>
-              <a:t>Cifras verificadas en vivo contra el sistema en producción, 13 de agosto de 2026.</a:t>
+              <a:t>Cifras verificadas en vivo contra el sistema en producción, 28 de agosto de 2026.</a:t>
             </a:r>
           </a:p>
         </p:txBody>
@@ -11552,7 +11552,7 @@
                 </a:solidFill>
                 <a:latin typeface="Calibri"/>
               </a:rPr>
-              <a:t>82</a:t>
+              <a:t>95</a:t>
             </a:r>
           </a:p>
         </p:txBody>
@@ -11626,7 +11626,7 @@
                 </a:solidFill>
                 <a:latin typeface="Calibri"/>
               </a:rPr>
-              <a:t>servidores, bases de datos y repositorios de código</a:t>
+              <a:t>79 repositorios de código, 9 servidores, 4 bases de datos, 3 otros</a:t>
             </a:r>
           </a:p>
         </p:txBody>
@@ -11751,7 +11751,7 @@
                 </a:solidFill>
                 <a:latin typeface="Calibri"/>
               </a:rPr>
-              <a:t>8,799</a:t>
+              <a:t>7,545</a:t>
             </a:r>
           </a:p>
         </p:txBody>
@@ -11786,7 +11786,7 @@
                 </a:solidFill>
                 <a:latin typeface="Calibri"/>
               </a:rPr>
-              <a:t>Hallazgos reales activos</a:t>
+              <a:t>Hallazgos de seguridad reales</a:t>
             </a:r>
           </a:p>
         </p:txBody>
@@ -11825,7 +11825,7 @@
                 </a:solidFill>
                 <a:latin typeface="Calibri"/>
               </a:rPr>
-              <a:t>sube frente al 11 de agosto: varios auditores de auto-diagnóstico llevaban semanas escaneando en silencio una ruta inexistente dentro del contenedor</a:t>
+              <a:t>separados de 26,175 hallazgos informativos (calidad de código, métricas de proceso, marcadores) desde la clasificación real/informativo de agosto</a:t>
             </a:r>
           </a:p>
         </p:txBody>
@@ -11950,7 +11950,7 @@
                 </a:solidFill>
                 <a:latin typeface="Calibri"/>
               </a:rPr>
-              <a:t>1,285</a:t>
+              <a:t>280</a:t>
             </a:r>
           </a:p>
         </p:txBody>
@@ -12024,7 +12024,7 @@
                 </a:solidFill>
                 <a:latin typeface="Calibri"/>
               </a:rPr>
-              <a:t>requieren atención prioritaria</a:t>
+              <a:t>reales y abiertos, requieren atención prioritaria</a:t>
             </a:r>
           </a:p>
         </p:txBody>
@@ -12149,7 +12149,7 @@
                 </a:solidFill>
                 <a:latin typeface="Calibri"/>
               </a:rPr>
-              <a:t>17</a:t>
+              <a:t>24</a:t>
             </a:r>
           </a:p>
         </p:txBody>
@@ -12348,7 +12348,7 @@
                 </a:solidFill>
                 <a:latin typeface="Calibri"/>
               </a:rPr>
-              <a:t>46</a:t>
+              <a:t>869</a:t>
             </a:r>
           </a:p>
         </p:txBody>
@@ -12422,7 +12422,7 @@
                 </a:solidFill>
                 <a:latin typeface="Calibri"/>
               </a:rPr>
-              <a:t>(SLA) — ya calculados y visibles para cada hallazgo crítico</a:t>
+              <a:t>(SLA) reales y abiertos — de ellos 271 son críticos</a:t>
             </a:r>
           </a:p>
         </p:txBody>
@@ -12656,7 +12656,7 @@
                 </a:solidFill>
                 <a:latin typeface="Calibri"/>
               </a:rPr>
-              <a:t>Nota de transparencia: la cifra de hallazgos subió al corregir varios auditores que llevaban tiempo devolviendo "0 hallazgos" en silencio por una ruta de análisis mal configurada — no porque haya nuevas amenazas, sino porque ahora se ven hallazgos reales que antes eran invisibles.</a:t>
+              <a:t>Nota de transparencia: desde agosto Centinela separa los hallazgos de seguridad reales de los informativos (calidad de código, deuda de proceso). El 92 % del total pertenece a repositorios de código, no a infraestructura; reportar el número combinado exageraría el riesgo real.</a:t>
             </a:r>
           </a:p>
         </p:txBody>
